--- a/classes/parte-11-devsecops-y-seguridad-del-sdlc/242-seguridad-en-pipelines-ci-cd/clase-242-presentacion.pptx
+++ b/classes/parte-11-devsecops-y-seguridad-del-sdlc/242-seguridad-en-pipelines-ci-cd/clase-242-presentacion.pptx
@@ -17,6 +17,10 @@
     <p:sldId id="265" r:id="rId16"/>
     <p:sldId id="266" r:id="rId17"/>
     <p:sldId id="267" r:id="rId18"/>
+    <p:sldId id="268" r:id="rId19"/>
+    <p:sldId id="269" r:id="rId20"/>
+    <p:sldId id="270" r:id="rId21"/>
+    <p:sldId id="271" r:id="rId22"/>
   </p:sldIdLst>
   <p:sldSz cx="9144000" cy="6858000" type="screen4x3"/>
   <p:notesSz cx="6858000" cy="9144000"/>
@@ -3198,7 +3202,7 @@
                   <a:srgbClr val="0B3D2E"/>
                 </a:solidFill>
               </a:rPr>
-              <a:t>⚠️ Errores comunes</a:t>
+              <a:t>🧪 Laboratorio guiado</a:t>
             </a:r>
           </a:p>
         </p:txBody>
@@ -3236,67 +3240,97 @@
                   <a:srgbClr val="22282E"/>
                 </a:solidFill>
               </a:rPr>
-              <a:t>•  Un PR de fork robó un secreto — pullrequesttarget con checkout del PR. Separa el código no confiable de los jobs con secretos.</a:t>
-            </a:r>
-          </a:p>
-          <a:p>
-            <a:pPr>
-              <a:spcAft>
-                <a:spcPts val="600"/>
-              </a:spcAft>
-            </a:pPr>
-            <a:r>
-              <a:rPr sz="1500">
-                <a:solidFill>
-                  <a:srgbClr val="22282E"/>
-                </a:solidFill>
-              </a:rPr>
-              <a:t>•  Una acción "de confianza" inyectó código — Estaba pinneada a un tag mutable reescrito. Pin a SHA siempre.</a:t>
-            </a:r>
-          </a:p>
-          <a:p>
-            <a:pPr>
-              <a:spcAft>
-                <a:spcPts val="600"/>
-              </a:spcAft>
-            </a:pPr>
-            <a:r>
-              <a:rPr sz="1500">
-                <a:solidFill>
-                  <a:srgbClr val="22282E"/>
-                </a:solidFill>
-              </a:rPr>
-              <a:t>•  GITHUBTOKEN con permisos de escritura por defecto — No se restringió. Define permissions: contents: read a nivel global.</a:t>
-            </a:r>
-          </a:p>
-          <a:p>
-            <a:pPr>
-              <a:spcAft>
-                <a:spcPts val="600"/>
-              </a:spcAft>
-            </a:pPr>
-            <a:r>
-              <a:rPr sz="1500">
-                <a:solidFill>
-                  <a:srgbClr val="22282E"/>
-                </a:solidFill>
-              </a:rPr>
-              <a:t>•  Secretos long-lived rotados a mano cada 90 días — Deuda operativa. Migra a OIDC con credenciales efímeras.</a:t>
-            </a:r>
-          </a:p>
-          <a:p>
-            <a:pPr>
-              <a:spcAft>
-                <a:spcPts val="600"/>
-              </a:spcAft>
-            </a:pPr>
-            <a:r>
-              <a:rPr sz="1500">
-                <a:solidFill>
-                  <a:srgbClr val="22282E"/>
-                </a:solidFill>
-              </a:rPr>
-              <a:t>•  El runner descarga y ejecuta scripts de internet — Egress sin control. Usa harden-runner para restringir red.</a:t>
+              <a:t>•  Audita tus workflows con zizmor y actionlint:</a:t>
+            </a:r>
+          </a:p>
+          <a:p>
+            <a:pPr>
+              <a:spcAft>
+                <a:spcPts val="600"/>
+              </a:spcAft>
+            </a:pPr>
+            <a:r>
+              <a:rPr sz="1500">
+                <a:solidFill>
+                  <a:srgbClr val="22282E"/>
+                </a:solidFill>
+              </a:rPr>
+              <a:t>•  Anota hallazgos: permisos amplios, acciones sin pin, uso de pullrequesttarget.</a:t>
+            </a:r>
+          </a:p>
+          <a:p>
+            <a:pPr>
+              <a:spcAft>
+                <a:spcPts val="600"/>
+              </a:spcAft>
+            </a:pPr>
+            <a:r>
+              <a:rPr sz="1500">
+                <a:solidFill>
+                  <a:srgbClr val="22282E"/>
+                </a:solidFill>
+              </a:rPr>
+              <a:t>•  Restringe permisos. Aplica mínimo privilegio a nivel de workflow y sube por job solo lo necesario:</a:t>
+            </a:r>
+          </a:p>
+          <a:p>
+            <a:pPr>
+              <a:spcAft>
+                <a:spcPts val="600"/>
+              </a:spcAft>
+            </a:pPr>
+            <a:r>
+              <a:rPr sz="1500">
+                <a:solidFill>
+                  <a:srgbClr val="22282E"/>
+                </a:solidFill>
+              </a:rPr>
+              <a:t>•  Fija acciones a SHA:</a:t>
+            </a:r>
+          </a:p>
+          <a:p>
+            <a:pPr>
+              <a:spcAft>
+                <a:spcPts val="600"/>
+              </a:spcAft>
+            </a:pPr>
+            <a:r>
+              <a:rPr sz="1500">
+                <a:solidFill>
+                  <a:srgbClr val="22282E"/>
+                </a:solidFill>
+              </a:rPr>
+              <a:t>•  Protege builds de forks. Evita pullrequesttarget con checkout del código del PR; si lo necesitas, no expongas secretos y separa el job que corre código no confiable del que usa credenciales.</a:t>
+            </a:r>
+          </a:p>
+          <a:p>
+            <a:pPr>
+              <a:spcAft>
+                <a:spcPts val="600"/>
+              </a:spcAft>
+            </a:pPr>
+            <a:r>
+              <a:rPr sz="1500">
+                <a:solidFill>
+                  <a:srgbClr val="22282E"/>
+                </a:solidFill>
+              </a:rPr>
+              <a:t>•  Adopta OIDC. Configura el despliegue a la nube con federación de identidad en vez de guardar claves de acceso long-lived como secretos.</a:t>
+            </a:r>
+          </a:p>
+          <a:p>
+            <a:pPr>
+              <a:spcAft>
+                <a:spcPts val="600"/>
+              </a:spcAft>
+            </a:pPr>
+            <a:r>
+              <a:rPr sz="1500">
+                <a:solidFill>
+                  <a:srgbClr val="22282E"/>
+                </a:solidFill>
+              </a:rPr>
+              <a:t>•  Endurece el runner. Añade step-security/harden-runner para bloquear egress no esperado y detectar exfiltración.</a:t>
             </a:r>
           </a:p>
         </p:txBody>
@@ -3347,7 +3381,7 @@
                   <a:srgbClr val="0B3D2E"/>
                 </a:solidFill>
               </a:rPr>
-              <a:t>❓ Preguntas frecuentes</a:t>
+              <a:t>✍️ Ejercicios</a:t>
             </a:r>
           </a:p>
         </p:txBody>
@@ -3385,97 +3419,82 @@
                   <a:srgbClr val="22282E"/>
                 </a:solidFill>
               </a:rPr>
-              <a:t>•  ❓ ¿Por qué pinnear a SHA si confío en actions/checkout?</a:t>
-            </a:r>
-          </a:p>
-          <a:p>
-            <a:pPr>
-              <a:spcAft>
-                <a:spcPts val="600"/>
-              </a:spcAft>
-            </a:pPr>
-            <a:r>
-              <a:rPr sz="1500">
-                <a:solidFill>
-                  <a:srgbClr val="22282E"/>
-                </a:solidFill>
-              </a:rPr>
-              <a:t>•  Confías en el código actual, no en cualquier código futuro que un tag mutable pueda apuntar si la cuenta de la acción se compromete. El SHA es inmutable.</a:t>
-            </a:r>
-          </a:p>
-          <a:p>
-            <a:pPr>
-              <a:spcAft>
-                <a:spcPts val="600"/>
-              </a:spcAft>
-            </a:pPr>
-            <a:r>
-              <a:rPr sz="1500">
-                <a:solidFill>
-                  <a:srgbClr val="22282E"/>
-                </a:solidFill>
-              </a:rPr>
-              <a:t>•  ❓ ¿Cuál es la diferencia entre pullrequest y pullrequesttarget?</a:t>
-            </a:r>
-          </a:p>
-          <a:p>
-            <a:pPr>
-              <a:spcAft>
-                <a:spcPts val="600"/>
-              </a:spcAft>
-            </a:pPr>
-            <a:r>
-              <a:rPr sz="1500">
-                <a:solidFill>
-                  <a:srgbClr val="22282E"/>
-                </a:solidFill>
-              </a:rPr>
-              <a:t>•  pullrequest corre sin secretos del repo base (seguro para forks); pullrequesttarget corre con ellos y en el contexto del base, por eso es peligroso combinarlo con checkout del código del PR.</a:t>
-            </a:r>
-          </a:p>
-          <a:p>
-            <a:pPr>
-              <a:spcAft>
-                <a:spcPts val="600"/>
-              </a:spcAft>
-            </a:pPr>
-            <a:r>
-              <a:rPr sz="1500">
-                <a:solidFill>
-                  <a:srgbClr val="22282E"/>
-                </a:solidFill>
-              </a:rPr>
-              <a:t>•  ❓ ¿OIDC elimina todos los secretos?</a:t>
-            </a:r>
-          </a:p>
-          <a:p>
-            <a:pPr>
-              <a:spcAft>
-                <a:spcPts val="600"/>
-              </a:spcAft>
-            </a:pPr>
-            <a:r>
-              <a:rPr sz="1500">
-                <a:solidFill>
-                  <a:srgbClr val="22282E"/>
-                </a:solidFill>
-              </a:rPr>
-              <a:t>•  Elimina los de larga vida hacia proveedores que soportan federación (nube, registries). Puede quedar algún secreto, pero reduces drásticamente la superficie.</a:t>
-            </a:r>
-          </a:p>
-          <a:p>
-            <a:pPr>
-              <a:spcAft>
-                <a:spcPts val="600"/>
-              </a:spcAft>
-            </a:pPr>
-            <a:r>
-              <a:rPr sz="1500">
-                <a:solidFill>
-                  <a:srgbClr val="22282E"/>
-                </a:solidFill>
-              </a:rPr>
-              <a:t>•  ❓ ¿Basta con auditar una vez?</a:t>
+              <a:t>•  Audita un workflow con zizmor y clasifica los hallazgos por severidad.</a:t>
+            </a:r>
+          </a:p>
+          <a:p>
+            <a:pPr>
+              <a:spcAft>
+                <a:spcPts val="600"/>
+              </a:spcAft>
+            </a:pPr>
+            <a:r>
+              <a:rPr sz="1500">
+                <a:solidFill>
+                  <a:srgbClr val="22282E"/>
+                </a:solidFill>
+              </a:rPr>
+              <a:t>•  Reescribe un workflow para aplicar mínimo privilegio de permisos.</a:t>
+            </a:r>
+          </a:p>
+          <a:p>
+            <a:pPr>
+              <a:spcAft>
+                <a:spcPts val="600"/>
+              </a:spcAft>
+            </a:pPr>
+            <a:r>
+              <a:rPr sz="1500">
+                <a:solidFill>
+                  <a:srgbClr val="22282E"/>
+                </a:solidFill>
+              </a:rPr>
+              <a:t>•  Convierte todas las acciones de un workflow a pinning por SHA.</a:t>
+            </a:r>
+          </a:p>
+          <a:p>
+            <a:pPr>
+              <a:spcAft>
+                <a:spcPts val="600"/>
+              </a:spcAft>
+            </a:pPr>
+            <a:r>
+              <a:rPr sz="1500">
+                <a:solidFill>
+                  <a:srgbClr val="22282E"/>
+                </a:solidFill>
+              </a:rPr>
+              <a:t>•  Explica cómo pullrequesttarget puede filtrar secretos y cómo evitarlo.</a:t>
+            </a:r>
+          </a:p>
+          <a:p>
+            <a:pPr>
+              <a:spcAft>
+                <a:spcPts val="600"/>
+              </a:spcAft>
+            </a:pPr>
+            <a:r>
+              <a:rPr sz="1500">
+                <a:solidFill>
+                  <a:srgbClr val="22282E"/>
+                </a:solidFill>
+              </a:rPr>
+              <a:t>•  Configura OIDC para desplegar a AWS/GCP sin secretos de larga vida.</a:t>
+            </a:r>
+          </a:p>
+          <a:p>
+            <a:pPr>
+              <a:spcAft>
+                <a:spcPts val="600"/>
+              </a:spcAft>
+            </a:pPr>
+            <a:r>
+              <a:rPr sz="1500">
+                <a:solidFill>
+                  <a:srgbClr val="22282E"/>
+                </a:solidFill>
+              </a:rPr>
+              <a:t>•  Añade harden-runner y provoca/detecta un egress no esperado.</a:t>
             </a:r>
           </a:p>
         </p:txBody>
@@ -3526,7 +3545,7 @@
                   <a:srgbClr val="0B3D2E"/>
                 </a:solidFill>
               </a:rPr>
-              <a:t>🔗 Referencias</a:t>
+              <a:t>📝 Reto verificable</a:t>
             </a:r>
           </a:p>
         </p:txBody>
@@ -3564,6 +3583,483 @@
                   <a:srgbClr val="22282E"/>
                 </a:solidFill>
               </a:rPr>
+              <a:t>•  Endurece un pipeline de CI/CD real aplicando los controles clave y demuéstralo con una auditoría.</a:t>
+            </a:r>
+          </a:p>
+          <a:p>
+            <a:pPr>
+              <a:spcAft>
+                <a:spcPts val="600"/>
+              </a:spcAft>
+            </a:pPr>
+            <a:r>
+              <a:rPr sz="1500">
+                <a:solidFill>
+                  <a:srgbClr val="22282E"/>
+                </a:solidFill>
+              </a:rPr>
+              <a:t>•  Criterio de aceptación: (a) todos los workflows tienen permissions de mínimo privilegio;</a:t>
+            </a:r>
+          </a:p>
+          <a:p>
+            <a:pPr>
+              <a:spcAft>
+                <a:spcPts val="600"/>
+              </a:spcAft>
+            </a:pPr>
+            <a:r>
+              <a:rPr sz="1500">
+                <a:solidFill>
+                  <a:srgbClr val="22282E"/>
+                </a:solidFill>
+              </a:rPr>
+              <a:t>•  (b) todas las acciones de terceros están pinneadas a SHA; (c) no hay uso inseguro de</a:t>
+            </a:r>
+          </a:p>
+          <a:p>
+            <a:pPr>
+              <a:spcAft>
+                <a:spcPts val="600"/>
+              </a:spcAft>
+            </a:pPr>
+            <a:r>
+              <a:rPr sz="1500">
+                <a:solidFill>
+                  <a:srgbClr val="22282E"/>
+                </a:solidFill>
+              </a:rPr>
+              <a:t>•  pullrequesttarget con secretos expuestos a código de forks; (d) el despliegue usa OIDC o,</a:t>
+            </a:r>
+          </a:p>
+          <a:p>
+            <a:pPr>
+              <a:spcAft>
+                <a:spcPts val="600"/>
+              </a:spcAft>
+            </a:pPr>
+            <a:r>
+              <a:rPr sz="1500">
+                <a:solidFill>
+                  <a:srgbClr val="22282E"/>
+                </a:solidFill>
+              </a:rPr>
+              <a:t>•  si no es posible, secretos con scope mínimo; y (e) zizmor no reporta hallazgos de severidad alta.</a:t>
+            </a:r>
+          </a:p>
+        </p:txBody>
+      </p:sp>
+    </p:spTree>
+  </p:cSld>
+  <p:clrMapOvr>
+    <a:masterClrMapping/>
+  </p:clrMapOvr>
+</p:sld>
+</file>
+
+<file path=ppt/slides/slide13.xml><?xml version="1.0" encoding="utf-8"?>
+<p:sld xmlns:a="http://schemas.openxmlformats.org/drawingml/2006/main" xmlns:p="http://schemas.openxmlformats.org/presentationml/2006/main" xmlns:r="http://schemas.openxmlformats.org/officeDocument/2006/relationships">
+  <p:cSld>
+    <p:spTree>
+      <p:nvGrpSpPr>
+        <p:cNvPr id="1" name=""/>
+        <p:cNvGrpSpPr/>
+        <p:nvPr/>
+      </p:nvGrpSpPr>
+      <p:grpSpPr/>
+      <p:sp>
+        <p:nvSpPr>
+          <p:cNvPr id="2" name="TextBox 1"/>
+          <p:cNvSpPr txBox="1"/>
+          <p:nvPr/>
+        </p:nvSpPr>
+        <p:spPr>
+          <a:xfrm>
+            <a:off x="457200" y="320040"/>
+            <a:ext cx="8229600" cy="822960"/>
+          </a:xfrm>
+          <a:prstGeom prst="rect">
+            <a:avLst/>
+          </a:prstGeom>
+          <a:noFill/>
+        </p:spPr>
+        <p:txBody>
+          <a:bodyPr wrap="square">
+            <a:spAutoFit/>
+          </a:bodyPr>
+          <a:lstStyle/>
+          <a:p>
+            <a:r>
+              <a:rPr sz="2600" b="1">
+                <a:solidFill>
+                  <a:srgbClr val="0B3D2E"/>
+                </a:solidFill>
+              </a:rPr>
+              <a:t>⚠️ Errores comunes</a:t>
+            </a:r>
+          </a:p>
+        </p:txBody>
+      </p:sp>
+      <p:sp>
+        <p:nvSpPr>
+          <p:cNvPr id="3" name="TextBox 2"/>
+          <p:cNvSpPr txBox="1"/>
+          <p:nvPr/>
+        </p:nvSpPr>
+        <p:spPr>
+          <a:xfrm>
+            <a:off x="457200" y="1280160"/>
+            <a:ext cx="8229600" cy="4937760"/>
+          </a:xfrm>
+          <a:prstGeom prst="rect">
+            <a:avLst/>
+          </a:prstGeom>
+          <a:noFill/>
+        </p:spPr>
+        <p:txBody>
+          <a:bodyPr wrap="square">
+            <a:spAutoFit/>
+          </a:bodyPr>
+          <a:lstStyle/>
+          <a:p>
+            <a:pPr>
+              <a:spcAft>
+                <a:spcPts val="600"/>
+              </a:spcAft>
+            </a:pPr>
+            <a:r>
+              <a:rPr sz="1500">
+                <a:solidFill>
+                  <a:srgbClr val="22282E"/>
+                </a:solidFill>
+              </a:rPr>
+              <a:t>•  Un PR de fork robó un secreto — pullrequesttarget con checkout del PR. Separa el código no confiable de los jobs con secretos.</a:t>
+            </a:r>
+          </a:p>
+          <a:p>
+            <a:pPr>
+              <a:spcAft>
+                <a:spcPts val="600"/>
+              </a:spcAft>
+            </a:pPr>
+            <a:r>
+              <a:rPr sz="1500">
+                <a:solidFill>
+                  <a:srgbClr val="22282E"/>
+                </a:solidFill>
+              </a:rPr>
+              <a:t>•  Una acción "de confianza" inyectó código — Estaba pinneada a un tag mutable reescrito. Pin a SHA siempre.</a:t>
+            </a:r>
+          </a:p>
+          <a:p>
+            <a:pPr>
+              <a:spcAft>
+                <a:spcPts val="600"/>
+              </a:spcAft>
+            </a:pPr>
+            <a:r>
+              <a:rPr sz="1500">
+                <a:solidFill>
+                  <a:srgbClr val="22282E"/>
+                </a:solidFill>
+              </a:rPr>
+              <a:t>•  GITHUBTOKEN con permisos de escritura por defecto — No se restringió. Define permissions: contents: read a nivel global.</a:t>
+            </a:r>
+          </a:p>
+          <a:p>
+            <a:pPr>
+              <a:spcAft>
+                <a:spcPts val="600"/>
+              </a:spcAft>
+            </a:pPr>
+            <a:r>
+              <a:rPr sz="1500">
+                <a:solidFill>
+                  <a:srgbClr val="22282E"/>
+                </a:solidFill>
+              </a:rPr>
+              <a:t>•  Secretos long-lived rotados a mano cada 90 días — Deuda operativa. Migra a OIDC con credenciales efímeras.</a:t>
+            </a:r>
+          </a:p>
+          <a:p>
+            <a:pPr>
+              <a:spcAft>
+                <a:spcPts val="600"/>
+              </a:spcAft>
+            </a:pPr>
+            <a:r>
+              <a:rPr sz="1500">
+                <a:solidFill>
+                  <a:srgbClr val="22282E"/>
+                </a:solidFill>
+              </a:rPr>
+              <a:t>•  El runner descarga y ejecuta scripts de internet — Egress sin control. Usa harden-runner para restringir red.</a:t>
+            </a:r>
+          </a:p>
+        </p:txBody>
+      </p:sp>
+    </p:spTree>
+  </p:cSld>
+  <p:clrMapOvr>
+    <a:masterClrMapping/>
+  </p:clrMapOvr>
+</p:sld>
+</file>
+
+<file path=ppt/slides/slide14.xml><?xml version="1.0" encoding="utf-8"?>
+<p:sld xmlns:a="http://schemas.openxmlformats.org/drawingml/2006/main" xmlns:p="http://schemas.openxmlformats.org/presentationml/2006/main" xmlns:r="http://schemas.openxmlformats.org/officeDocument/2006/relationships">
+  <p:cSld>
+    <p:spTree>
+      <p:nvGrpSpPr>
+        <p:cNvPr id="1" name=""/>
+        <p:cNvGrpSpPr/>
+        <p:nvPr/>
+      </p:nvGrpSpPr>
+      <p:grpSpPr/>
+      <p:sp>
+        <p:nvSpPr>
+          <p:cNvPr id="2" name="TextBox 1"/>
+          <p:cNvSpPr txBox="1"/>
+          <p:nvPr/>
+        </p:nvSpPr>
+        <p:spPr>
+          <a:xfrm>
+            <a:off x="457200" y="320040"/>
+            <a:ext cx="8229600" cy="822960"/>
+          </a:xfrm>
+          <a:prstGeom prst="rect">
+            <a:avLst/>
+          </a:prstGeom>
+          <a:noFill/>
+        </p:spPr>
+        <p:txBody>
+          <a:bodyPr wrap="square">
+            <a:spAutoFit/>
+          </a:bodyPr>
+          <a:lstStyle/>
+          <a:p>
+            <a:r>
+              <a:rPr sz="2600" b="1">
+                <a:solidFill>
+                  <a:srgbClr val="0B3D2E"/>
+                </a:solidFill>
+              </a:rPr>
+              <a:t>❓ Preguntas frecuentes</a:t>
+            </a:r>
+          </a:p>
+        </p:txBody>
+      </p:sp>
+      <p:sp>
+        <p:nvSpPr>
+          <p:cNvPr id="3" name="TextBox 2"/>
+          <p:cNvSpPr txBox="1"/>
+          <p:nvPr/>
+        </p:nvSpPr>
+        <p:spPr>
+          <a:xfrm>
+            <a:off x="457200" y="1280160"/>
+            <a:ext cx="8229600" cy="4937760"/>
+          </a:xfrm>
+          <a:prstGeom prst="rect">
+            <a:avLst/>
+          </a:prstGeom>
+          <a:noFill/>
+        </p:spPr>
+        <p:txBody>
+          <a:bodyPr wrap="square">
+            <a:spAutoFit/>
+          </a:bodyPr>
+          <a:lstStyle/>
+          <a:p>
+            <a:pPr>
+              <a:spcAft>
+                <a:spcPts val="600"/>
+              </a:spcAft>
+            </a:pPr>
+            <a:r>
+              <a:rPr sz="1500">
+                <a:solidFill>
+                  <a:srgbClr val="22282E"/>
+                </a:solidFill>
+              </a:rPr>
+              <a:t>•  ❓ ¿Por qué pinnear a SHA si confío en actions/checkout?</a:t>
+            </a:r>
+          </a:p>
+          <a:p>
+            <a:pPr>
+              <a:spcAft>
+                <a:spcPts val="600"/>
+              </a:spcAft>
+            </a:pPr>
+            <a:r>
+              <a:rPr sz="1500">
+                <a:solidFill>
+                  <a:srgbClr val="22282E"/>
+                </a:solidFill>
+              </a:rPr>
+              <a:t>•  Confías en el código actual, no en cualquier código futuro que un tag mutable pueda apuntar si la cuenta de la acción se compromete. El SHA es inmutable.</a:t>
+            </a:r>
+          </a:p>
+          <a:p>
+            <a:pPr>
+              <a:spcAft>
+                <a:spcPts val="600"/>
+              </a:spcAft>
+            </a:pPr>
+            <a:r>
+              <a:rPr sz="1500">
+                <a:solidFill>
+                  <a:srgbClr val="22282E"/>
+                </a:solidFill>
+              </a:rPr>
+              <a:t>•  ❓ ¿Cuál es la diferencia entre pullrequest y pullrequesttarget?</a:t>
+            </a:r>
+          </a:p>
+          <a:p>
+            <a:pPr>
+              <a:spcAft>
+                <a:spcPts val="600"/>
+              </a:spcAft>
+            </a:pPr>
+            <a:r>
+              <a:rPr sz="1500">
+                <a:solidFill>
+                  <a:srgbClr val="22282E"/>
+                </a:solidFill>
+              </a:rPr>
+              <a:t>•  pullrequest corre sin secretos del repo base (seguro para forks); pullrequesttarget corre con ellos y en el contexto del base, por eso es peligroso combinarlo con checkout del código del PR.</a:t>
+            </a:r>
+          </a:p>
+          <a:p>
+            <a:pPr>
+              <a:spcAft>
+                <a:spcPts val="600"/>
+              </a:spcAft>
+            </a:pPr>
+            <a:r>
+              <a:rPr sz="1500">
+                <a:solidFill>
+                  <a:srgbClr val="22282E"/>
+                </a:solidFill>
+              </a:rPr>
+              <a:t>•  ❓ ¿OIDC elimina todos los secretos?</a:t>
+            </a:r>
+          </a:p>
+          <a:p>
+            <a:pPr>
+              <a:spcAft>
+                <a:spcPts val="600"/>
+              </a:spcAft>
+            </a:pPr>
+            <a:r>
+              <a:rPr sz="1500">
+                <a:solidFill>
+                  <a:srgbClr val="22282E"/>
+                </a:solidFill>
+              </a:rPr>
+              <a:t>•  Elimina los de larga vida hacia proveedores que soportan federación (nube, registries). Puede quedar algún secreto, pero reduces drásticamente la superficie.</a:t>
+            </a:r>
+          </a:p>
+          <a:p>
+            <a:pPr>
+              <a:spcAft>
+                <a:spcPts val="600"/>
+              </a:spcAft>
+            </a:pPr>
+            <a:r>
+              <a:rPr sz="1500">
+                <a:solidFill>
+                  <a:srgbClr val="22282E"/>
+                </a:solidFill>
+              </a:rPr>
+              <a:t>•  ❓ ¿Basta con auditar una vez?</a:t>
+            </a:r>
+          </a:p>
+        </p:txBody>
+      </p:sp>
+    </p:spTree>
+  </p:cSld>
+  <p:clrMapOvr>
+    <a:masterClrMapping/>
+  </p:clrMapOvr>
+</p:sld>
+</file>
+
+<file path=ppt/slides/slide15.xml><?xml version="1.0" encoding="utf-8"?>
+<p:sld xmlns:a="http://schemas.openxmlformats.org/drawingml/2006/main" xmlns:p="http://schemas.openxmlformats.org/presentationml/2006/main" xmlns:r="http://schemas.openxmlformats.org/officeDocument/2006/relationships">
+  <p:cSld>
+    <p:spTree>
+      <p:nvGrpSpPr>
+        <p:cNvPr id="1" name=""/>
+        <p:cNvGrpSpPr/>
+        <p:nvPr/>
+      </p:nvGrpSpPr>
+      <p:grpSpPr/>
+      <p:sp>
+        <p:nvSpPr>
+          <p:cNvPr id="2" name="TextBox 1"/>
+          <p:cNvSpPr txBox="1"/>
+          <p:nvPr/>
+        </p:nvSpPr>
+        <p:spPr>
+          <a:xfrm>
+            <a:off x="457200" y="320040"/>
+            <a:ext cx="8229600" cy="822960"/>
+          </a:xfrm>
+          <a:prstGeom prst="rect">
+            <a:avLst/>
+          </a:prstGeom>
+          <a:noFill/>
+        </p:spPr>
+        <p:txBody>
+          <a:bodyPr wrap="square">
+            <a:spAutoFit/>
+          </a:bodyPr>
+          <a:lstStyle/>
+          <a:p>
+            <a:r>
+              <a:rPr sz="2600" b="1">
+                <a:solidFill>
+                  <a:srgbClr val="0B3D2E"/>
+                </a:solidFill>
+              </a:rPr>
+              <a:t>🔗 Referencias</a:t>
+            </a:r>
+          </a:p>
+        </p:txBody>
+      </p:sp>
+      <p:sp>
+        <p:nvSpPr>
+          <p:cNvPr id="3" name="TextBox 2"/>
+          <p:cNvSpPr txBox="1"/>
+          <p:nvPr/>
+        </p:nvSpPr>
+        <p:spPr>
+          <a:xfrm>
+            <a:off x="457200" y="1280160"/>
+            <a:ext cx="8229600" cy="4937760"/>
+          </a:xfrm>
+          <a:prstGeom prst="rect">
+            <a:avLst/>
+          </a:prstGeom>
+          <a:noFill/>
+        </p:spPr>
+        <p:txBody>
+          <a:bodyPr wrap="square">
+            <a:spAutoFit/>
+          </a:bodyPr>
+          <a:lstStyle/>
+          <a:p>
+            <a:pPr>
+              <a:spcAft>
+                <a:spcPts val="600"/>
+              </a:spcAft>
+            </a:pPr>
+            <a:r>
+              <a:rPr sz="1500">
+                <a:solidFill>
+                  <a:srgbClr val="22282E"/>
+                </a:solidFill>
+              </a:rPr>
               <a:t>•  OWASP Top 10 CI/CD Security Risks — &lt;https://owasp.org/www-project-top-10-ci-cd-security-risks/&gt;</a:t>
             </a:r>
           </a:p>
@@ -3629,6 +4125,81 @@
           </a:p>
         </p:txBody>
       </p:sp>
+    </p:spTree>
+  </p:cSld>
+  <p:clrMapOvr>
+    <a:masterClrMapping/>
+  </p:clrMapOvr>
+</p:sld>
+</file>
+
+<file path=ppt/slides/slide16.xml><?xml version="1.0" encoding="utf-8"?>
+<p:sld xmlns:a="http://schemas.openxmlformats.org/drawingml/2006/main" xmlns:p="http://schemas.openxmlformats.org/presentationml/2006/main" xmlns:r="http://schemas.openxmlformats.org/officeDocument/2006/relationships">
+  <p:cSld>
+    <p:spTree>
+      <p:nvGrpSpPr>
+        <p:cNvPr id="1" name=""/>
+        <p:cNvGrpSpPr/>
+        <p:nvPr/>
+      </p:nvGrpSpPr>
+      <p:grpSpPr/>
+      <p:sp>
+        <p:nvSpPr>
+          <p:cNvPr id="2" name="TextBox 1"/>
+          <p:cNvSpPr txBox="1"/>
+          <p:nvPr/>
+        </p:nvSpPr>
+        <p:spPr>
+          <a:xfrm>
+            <a:off x="457200" y="274320"/>
+            <a:ext cx="8229600" cy="640080"/>
+          </a:xfrm>
+          <a:prstGeom prst="rect">
+            <a:avLst/>
+          </a:prstGeom>
+          <a:noFill/>
+        </p:spPr>
+        <p:txBody>
+          <a:bodyPr wrap="square">
+            <a:spAutoFit/>
+          </a:bodyPr>
+          <a:lstStyle/>
+          <a:p>
+            <a:r>
+              <a:rPr sz="2200" b="1">
+                <a:solidFill>
+                  <a:srgbClr val="0B3D2E"/>
+                </a:solidFill>
+              </a:rPr>
+              <a:t>Diagrama de la clase</a:t>
+            </a:r>
+          </a:p>
+        </p:txBody>
+      </p:sp>
+      <p:pic>
+        <p:nvPicPr>
+          <p:cNvPr id="3" name="Picture 2" descr="5344a4c142dfd9ff.png"/>
+          <p:cNvPicPr>
+            <a:picLocks noChangeAspect="1"/>
+          </p:cNvPicPr>
+          <p:nvPr/>
+        </p:nvPicPr>
+        <p:blipFill>
+          <a:blip r:embed="rId2"/>
+          <a:stretch>
+            <a:fillRect/>
+          </a:stretch>
+        </p:blipFill>
+        <p:spPr>
+          <a:xfrm>
+            <a:off x="457200" y="2971800"/>
+            <a:ext cx="8229600" cy="1554480"/>
+          </a:xfrm>
+          <a:prstGeom prst="rect">
+            <a:avLst/>
+          </a:prstGeom>
+        </p:spPr>
+      </p:pic>
     </p:spTree>
   </p:cSld>
   <p:clrMapOvr>
@@ -4167,7 +4738,7 @@
                   <a:srgbClr val="0B3D2E"/>
                 </a:solidFill>
               </a:rPr>
-              <a:t>📖 Definiciones y características</a:t>
+              <a:t>🧠 Explicación en profundidad</a:t>
             </a:r>
           </a:p>
         </p:txBody>
@@ -4205,82 +4776,82 @@
                   <a:srgbClr val="22282E"/>
                 </a:solidFill>
               </a:rPr>
-              <a:t>•  Poisoned Pipeline Execution (PPE): inyectar código malicioso que el pipeline ejecuta con sus privilegios. Característica: ocurre cuando el pipeline corre código no confiable de PRs.</a:t>
-            </a:r>
-          </a:p>
-          <a:p>
-            <a:pPr>
-              <a:spcAft>
-                <a:spcPts val="600"/>
-              </a:spcAft>
-            </a:pPr>
-            <a:r>
-              <a:rPr sz="1500">
-                <a:solidFill>
-                  <a:srgbClr val="22282E"/>
-                </a:solidFill>
-              </a:rPr>
-              <a:t>•  GITHUBTOKEN: token efímero del workflow. Característica: por defecto puede tener permisos amplios; restríngelo a read y sube solo lo necesario.</a:t>
-            </a:r>
-          </a:p>
-          <a:p>
-            <a:pPr>
-              <a:spcAft>
-                <a:spcPts val="600"/>
-              </a:spcAft>
-            </a:pPr>
-            <a:r>
-              <a:rPr sz="1500">
-                <a:solidFill>
-                  <a:srgbClr val="22282E"/>
-                </a:solidFill>
-              </a:rPr>
-              <a:t>•  Pinning a SHA: referenciar una acción por su hash inmutable en vez de un tag. Característica: un tag como @v3 es mutable y puede ser reescrito por un atacante que controle el repo de la acción.</a:t>
-            </a:r>
-          </a:p>
-          <a:p>
-            <a:pPr>
-              <a:spcAft>
-                <a:spcPts val="600"/>
-              </a:spcAft>
-            </a:pPr>
-            <a:r>
-              <a:rPr sz="1500">
-                <a:solidFill>
-                  <a:srgbClr val="22282E"/>
-                </a:solidFill>
-              </a:rPr>
-              <a:t>•  pullrequesttarget: evento que corre con secretos del repo base sobre código del PR. Característica: peligroso con forks; puede exfiltrar secretos.</a:t>
-            </a:r>
-          </a:p>
-          <a:p>
-            <a:pPr>
-              <a:spcAft>
-                <a:spcPts val="600"/>
-              </a:spcAft>
-            </a:pPr>
-            <a:r>
-              <a:rPr sz="1500">
-                <a:solidFill>
-                  <a:srgbClr val="22282E"/>
-                </a:solidFill>
-              </a:rPr>
-              <a:t>•  Runner efímero: máquina de CI de un solo uso. Característica: sin estado ni credenciales persistentes entre jobs.</a:t>
-            </a:r>
-          </a:p>
-          <a:p>
-            <a:pPr>
-              <a:spcAft>
-                <a:spcPts val="600"/>
-              </a:spcAft>
-            </a:pPr>
-            <a:r>
-              <a:rPr sz="1500">
-                <a:solidFill>
-                  <a:srgbClr val="22282E"/>
-                </a:solidFill>
-              </a:rPr>
-              <a:t>•  OIDC federation: obtener credenciales cloud cortas mediante identidad del workflow. Característica: elimina secretos de larga vida en el CI.</a:t>
+              <a:t>•  CI/CD lee código no confiable, descarga herramientas, ejecuta scripts y publica artefactos. A menudo posee tokens capaces de escribir en el repositorio, registrar paquetes o desplegar…</a:t>
+            </a:r>
+          </a:p>
+          <a:p>
+            <a:pPr>
+              <a:spcAft>
+                <a:spcPts val="600"/>
+              </a:spcAft>
+            </a:pPr>
+            <a:r>
+              <a:rPr sz="1500">
+                <a:solidFill>
+                  <a:srgbClr val="22282E"/>
+                </a:solidFill>
+              </a:rPr>
+              <a:t>•  El límite crítico se encuentra entre la contribución y el runner. En eventos como pullrequesttarget, el workflow puede ejecutarse con contexto privilegiado del repositorio base; combinarlo con…</a:t>
+            </a:r>
+          </a:p>
+          <a:p>
+            <a:pPr>
+              <a:spcAft>
+                <a:spcPts val="600"/>
+              </a:spcAft>
+            </a:pPr>
+            <a:r>
+              <a:rPr sz="1500">
+                <a:solidFill>
+                  <a:srgbClr val="22282E"/>
+                </a:solidFill>
+              </a:rPr>
+              <a:t>•  Una acción de terceros también es una dependencia ejecutable. GitHub documenta que fijarla a un SHA completo es la forma de obtener una referencia inmutable; el comentario puede conservar la versión…</a:t>
+            </a:r>
+          </a:p>
+          <a:p>
+            <a:pPr>
+              <a:spcAft>
+                <a:spcPts val="600"/>
+              </a:spcAft>
+            </a:pPr>
+            <a:r>
+              <a:rPr sz="1500">
+                <a:solidFill>
+                  <a:srgbClr val="22282E"/>
+                </a:solidFill>
+              </a:rPr>
+              <a:t>•  El GITHUBTOKEN debe declarar permisos por workflow o tarea; omitirlos deja decisiones a valores predeterminados que pueden cambiar por configuración. Publicar o desplegar requiere un job separado…</a:t>
+            </a:r>
+          </a:p>
+          <a:p>
+            <a:pPr>
+              <a:spcAft>
+                <a:spcPts val="600"/>
+              </a:spcAft>
+            </a:pPr>
+            <a:r>
+              <a:rPr sz="1500">
+                <a:solidFill>
+                  <a:srgbClr val="22282E"/>
+                </a:solidFill>
+              </a:rPr>
+              <a:t>•  Los runners efímeros reducen persistencia entre trabajos. Un runner autohospedado añade responsabilidad: parches, aislamiento, red de salida, limpieza y protección frente a PR no confiables. Un…</a:t>
+            </a:r>
+          </a:p>
+          <a:p>
+            <a:pPr>
+              <a:spcAft>
+                <a:spcPts val="600"/>
+              </a:spcAft>
+            </a:pPr>
+            <a:r>
+              <a:rPr sz="1500">
+                <a:solidFill>
+                  <a:srgbClr val="22282E"/>
+                </a:solidFill>
+              </a:rPr>
+              <a:t>•  Un workflow usa vendor/deploy@v2 con permiso de escritura y secreto cloud. Aunque la acción sea legítima hoy, el tag puede moverse o el repositorio comprometerse. El equipo revisa su procedencia…</a:t>
             </a:r>
           </a:p>
         </p:txBody>
@@ -4331,7 +4902,7 @@
                   <a:srgbClr val="0B3D2E"/>
                 </a:solidFill>
               </a:rPr>
-              <a:t>🧰 Herramientas y preparación</a:t>
+              <a:t>📔 Glosario operativo</a:t>
             </a:r>
           </a:p>
         </p:txBody>
@@ -4369,97 +4940,82 @@
                   <a:srgbClr val="22282E"/>
                 </a:solidFill>
               </a:rPr>
-              <a:t>•  GitHub Actions (o GitLab CI / Jenkins) como plataforma de ejemplo.</a:t>
-            </a:r>
-          </a:p>
-          <a:p>
-            <a:pPr>
-              <a:spcAft>
-                <a:spcPts val="600"/>
-              </a:spcAft>
-            </a:pPr>
-            <a:r>
-              <a:rPr sz="1500">
-                <a:solidFill>
-                  <a:srgbClr val="22282E"/>
-                </a:solidFill>
-              </a:rPr>
-              <a:t>•  zizmor — analizador estático de seguridad para workflows de GitHub Actions.</a:t>
-            </a:r>
-          </a:p>
-          <a:p>
-            <a:pPr>
-              <a:spcAft>
-                <a:spcPts val="600"/>
-              </a:spcAft>
-            </a:pPr>
-            <a:r>
-              <a:rPr sz="1500">
-                <a:solidFill>
-                  <a:srgbClr val="22282E"/>
-                </a:solidFill>
-              </a:rPr>
-              <a:t>•  actionlint — linter de sintaxis y buenas prácticas de workflows.</a:t>
-            </a:r>
-          </a:p>
-          <a:p>
-            <a:pPr>
-              <a:spcAft>
-                <a:spcPts val="600"/>
-              </a:spcAft>
-            </a:pPr>
-            <a:r>
-              <a:rPr sz="1500">
-                <a:solidFill>
-                  <a:srgbClr val="22282E"/>
-                </a:solidFill>
-              </a:rPr>
-              <a:t>•  StepSecurity Harden-Runner — monitoriza y restringe el tráfico de red del runner.</a:t>
-            </a:r>
-          </a:p>
-          <a:p>
-            <a:pPr>
-              <a:spcAft>
-                <a:spcPts val="600"/>
-              </a:spcAft>
-            </a:pPr>
-            <a:r>
-              <a:rPr sz="1500">
-                <a:solidFill>
-                  <a:srgbClr val="22282E"/>
-                </a:solidFill>
-              </a:rPr>
-              <a:t>•  Instalación de zizmor:</a:t>
-            </a:r>
-          </a:p>
-          <a:p>
-            <a:pPr>
-              <a:spcAft>
-                <a:spcPts val="600"/>
-              </a:spcAft>
-            </a:pPr>
-            <a:r>
-              <a:rPr sz="1500">
-                <a:solidFill>
-                  <a:srgbClr val="22282E"/>
-                </a:solidFill>
-              </a:rPr>
-              <a:t>•  pip install zizmor</a:t>
-            </a:r>
-          </a:p>
-          <a:p>
-            <a:pPr>
-              <a:spcAft>
-                <a:spcPts val="600"/>
-              </a:spcAft>
-            </a:pPr>
-            <a:r>
-              <a:rPr sz="1500">
-                <a:solidFill>
-                  <a:srgbClr val="22282E"/>
-                </a:solidFill>
-              </a:rPr>
-              <a:t>•  zizmor .github/workflows/</a:t>
+              <a:t>•  Término — Definición útil</a:t>
+            </a:r>
+          </a:p>
+          <a:p>
+            <a:pPr>
+              <a:spcAft>
+                <a:spcPts val="600"/>
+              </a:spcAft>
+            </a:pPr>
+            <a:r>
+              <a:rPr sz="1500">
+                <a:solidFill>
+                  <a:srgbClr val="22282E"/>
+                </a:solidFill>
+              </a:rPr>
+              <a:t>•  Runner — Entorno que ejecuta los pasos del workflow.</a:t>
+            </a:r>
+          </a:p>
+          <a:p>
+            <a:pPr>
+              <a:spcAft>
+                <a:spcPts val="600"/>
+              </a:spcAft>
+            </a:pPr>
+            <a:r>
+              <a:rPr sz="1500">
+                <a:solidFill>
+                  <a:srgbClr val="22282E"/>
+                </a:solidFill>
+              </a:rPr>
+              <a:t>•  Evento privilegiado — Disparador cuyo token o secretos tienen más autoridad que la entrada evaluada.</a:t>
+            </a:r>
+          </a:p>
+          <a:p>
+            <a:pPr>
+              <a:spcAft>
+                <a:spcPts val="600"/>
+              </a:spcAft>
+            </a:pPr>
+            <a:r>
+              <a:rPr sz="1500">
+                <a:solidFill>
+                  <a:srgbClr val="22282E"/>
+                </a:solidFill>
+              </a:rPr>
+              <a:t>•  Pinning — Fijación de una dependencia a una identidad inmutable, como SHA o digest.</a:t>
+            </a:r>
+          </a:p>
+          <a:p>
+            <a:pPr>
+              <a:spcAft>
+                <a:spcPts val="600"/>
+              </a:spcAft>
+            </a:pPr>
+            <a:r>
+              <a:rPr sz="1500">
+                <a:solidFill>
+                  <a:srgbClr val="22282E"/>
+                </a:solidFill>
+              </a:rPr>
+              <a:t>•  OIDC federation — Intercambio de identidad verificable por credenciales breves del proveedor.</a:t>
+            </a:r>
+          </a:p>
+          <a:p>
+            <a:pPr>
+              <a:spcAft>
+                <a:spcPts val="600"/>
+              </a:spcAft>
+            </a:pPr>
+            <a:r>
+              <a:rPr sz="1500">
+                <a:solidFill>
+                  <a:srgbClr val="22282E"/>
+                </a:solidFill>
+              </a:rPr>
+              <a:t>•  Procedencia — Evidencia de qué proceso e insumos produjeron un artefacto.</a:t>
             </a:r>
           </a:p>
         </p:txBody>
@@ -4510,7 +5066,7 @@
                   <a:srgbClr val="0B3D2E"/>
                 </a:solidFill>
               </a:rPr>
-              <a:t>🧪 Laboratorio guiado</a:t>
+              <a:t>✅ Criterio de dominio</a:t>
             </a:r>
           </a:p>
         </p:txBody>
@@ -4548,97 +5104,7 @@
                   <a:srgbClr val="22282E"/>
                 </a:solidFill>
               </a:rPr>
-              <a:t>•  Audita tus workflows con zizmor y actionlint:</a:t>
-            </a:r>
-          </a:p>
-          <a:p>
-            <a:pPr>
-              <a:spcAft>
-                <a:spcPts val="600"/>
-              </a:spcAft>
-            </a:pPr>
-            <a:r>
-              <a:rPr sz="1500">
-                <a:solidFill>
-                  <a:srgbClr val="22282E"/>
-                </a:solidFill>
-              </a:rPr>
-              <a:t>•  zizmor .github/workflows/ci.yml</a:t>
-            </a:r>
-          </a:p>
-          <a:p>
-            <a:pPr>
-              <a:spcAft>
-                <a:spcPts val="600"/>
-              </a:spcAft>
-            </a:pPr>
-            <a:r>
-              <a:rPr sz="1500">
-                <a:solidFill>
-                  <a:srgbClr val="22282E"/>
-                </a:solidFill>
-              </a:rPr>
-              <a:t>•  actionlint</a:t>
-            </a:r>
-          </a:p>
-          <a:p>
-            <a:pPr>
-              <a:spcAft>
-                <a:spcPts val="600"/>
-              </a:spcAft>
-            </a:pPr>
-            <a:r>
-              <a:rPr sz="1500">
-                <a:solidFill>
-                  <a:srgbClr val="22282E"/>
-                </a:solidFill>
-              </a:rPr>
-              <a:t>•  Anota hallazgos: permisos amplios, acciones sin pin, uso de pullrequesttarget.</a:t>
-            </a:r>
-          </a:p>
-          <a:p>
-            <a:pPr>
-              <a:spcAft>
-                <a:spcPts val="600"/>
-              </a:spcAft>
-            </a:pPr>
-            <a:r>
-              <a:rPr sz="1500">
-                <a:solidFill>
-                  <a:srgbClr val="22282E"/>
-                </a:solidFill>
-              </a:rPr>
-              <a:t>•  Restringe permisos. Aplica mínimo privilegio a nivel de workflow y sube por job solo lo necesario:</a:t>
-            </a:r>
-          </a:p>
-          <a:p>
-            <a:pPr>
-              <a:spcAft>
-                <a:spcPts val="600"/>
-              </a:spcAft>
-            </a:pPr>
-            <a:r>
-              <a:rPr sz="1500">
-                <a:solidFill>
-                  <a:srgbClr val="22282E"/>
-                </a:solidFill>
-              </a:rPr>
-              <a:t>•  permissions:</a:t>
-            </a:r>
-          </a:p>
-          <a:p>
-            <a:pPr>
-              <a:spcAft>
-                <a:spcPts val="600"/>
-              </a:spcAft>
-            </a:pPr>
-            <a:r>
-              <a:rPr sz="1500">
-                <a:solidFill>
-                  <a:srgbClr val="22282E"/>
-                </a:solidFill>
-              </a:rPr>
-              <a:t>•  contents: read     # por defecto de solo lectura para todo</a:t>
+              <a:t>•  Hay dominio cuando el alumno rastrea datos y privilegios desde el evento hasta el despliegue, reconoce ejecución de entrada no confiable, reduce permisos, fija dependencias, separa build de release y…</a:t>
             </a:r>
           </a:p>
         </p:txBody>
@@ -4689,7 +5155,7 @@
                   <a:srgbClr val="0B3D2E"/>
                 </a:solidFill>
               </a:rPr>
-              <a:t>✍️ Ejercicios</a:t>
+              <a:t>📖 Definiciones y características</a:t>
             </a:r>
           </a:p>
         </p:txBody>
@@ -4727,82 +5193,82 @@
                   <a:srgbClr val="22282E"/>
                 </a:solidFill>
               </a:rPr>
-              <a:t>•  Audita un workflow con zizmor y clasifica los hallazgos por severidad.</a:t>
-            </a:r>
-          </a:p>
-          <a:p>
-            <a:pPr>
-              <a:spcAft>
-                <a:spcPts val="600"/>
-              </a:spcAft>
-            </a:pPr>
-            <a:r>
-              <a:rPr sz="1500">
-                <a:solidFill>
-                  <a:srgbClr val="22282E"/>
-                </a:solidFill>
-              </a:rPr>
-              <a:t>•  Reescribe un workflow para aplicar mínimo privilegio de permisos.</a:t>
-            </a:r>
-          </a:p>
-          <a:p>
-            <a:pPr>
-              <a:spcAft>
-                <a:spcPts val="600"/>
-              </a:spcAft>
-            </a:pPr>
-            <a:r>
-              <a:rPr sz="1500">
-                <a:solidFill>
-                  <a:srgbClr val="22282E"/>
-                </a:solidFill>
-              </a:rPr>
-              <a:t>•  Convierte todas las acciones de un workflow a pinning por SHA.</a:t>
-            </a:r>
-          </a:p>
-          <a:p>
-            <a:pPr>
-              <a:spcAft>
-                <a:spcPts val="600"/>
-              </a:spcAft>
-            </a:pPr>
-            <a:r>
-              <a:rPr sz="1500">
-                <a:solidFill>
-                  <a:srgbClr val="22282E"/>
-                </a:solidFill>
-              </a:rPr>
-              <a:t>•  Explica cómo pullrequesttarget puede filtrar secretos y cómo evitarlo.</a:t>
-            </a:r>
-          </a:p>
-          <a:p>
-            <a:pPr>
-              <a:spcAft>
-                <a:spcPts val="600"/>
-              </a:spcAft>
-            </a:pPr>
-            <a:r>
-              <a:rPr sz="1500">
-                <a:solidFill>
-                  <a:srgbClr val="22282E"/>
-                </a:solidFill>
-              </a:rPr>
-              <a:t>•  Configura OIDC para desplegar a AWS/GCP sin secretos de larga vida.</a:t>
-            </a:r>
-          </a:p>
-          <a:p>
-            <a:pPr>
-              <a:spcAft>
-                <a:spcPts val="600"/>
-              </a:spcAft>
-            </a:pPr>
-            <a:r>
-              <a:rPr sz="1500">
-                <a:solidFill>
-                  <a:srgbClr val="22282E"/>
-                </a:solidFill>
-              </a:rPr>
-              <a:t>•  Añade harden-runner y provoca/detecta un egress no esperado.</a:t>
+              <a:t>•  Poisoned Pipeline Execution (PPE): inyectar código malicioso que el pipeline ejecuta con sus privilegios. Característica: ocurre cuando el pipeline corre código no confiable de PRs.</a:t>
+            </a:r>
+          </a:p>
+          <a:p>
+            <a:pPr>
+              <a:spcAft>
+                <a:spcPts val="600"/>
+              </a:spcAft>
+            </a:pPr>
+            <a:r>
+              <a:rPr sz="1500">
+                <a:solidFill>
+                  <a:srgbClr val="22282E"/>
+                </a:solidFill>
+              </a:rPr>
+              <a:t>•  GITHUBTOKEN: token efímero del workflow. Característica: por defecto puede tener permisos amplios; restríngelo a read y sube solo lo necesario.</a:t>
+            </a:r>
+          </a:p>
+          <a:p>
+            <a:pPr>
+              <a:spcAft>
+                <a:spcPts val="600"/>
+              </a:spcAft>
+            </a:pPr>
+            <a:r>
+              <a:rPr sz="1500">
+                <a:solidFill>
+                  <a:srgbClr val="22282E"/>
+                </a:solidFill>
+              </a:rPr>
+              <a:t>•  Pinning a SHA: referenciar una acción por su hash inmutable en vez de un tag. Característica: un tag como @v3 es mutable y puede ser reescrito por un atacante que controle el repo de la acción.</a:t>
+            </a:r>
+          </a:p>
+          <a:p>
+            <a:pPr>
+              <a:spcAft>
+                <a:spcPts val="600"/>
+              </a:spcAft>
+            </a:pPr>
+            <a:r>
+              <a:rPr sz="1500">
+                <a:solidFill>
+                  <a:srgbClr val="22282E"/>
+                </a:solidFill>
+              </a:rPr>
+              <a:t>•  pullrequesttarget: evento que corre con secretos del repo base sobre código del PR. Característica: peligroso con forks; puede exfiltrar secretos.</a:t>
+            </a:r>
+          </a:p>
+          <a:p>
+            <a:pPr>
+              <a:spcAft>
+                <a:spcPts val="600"/>
+              </a:spcAft>
+            </a:pPr>
+            <a:r>
+              <a:rPr sz="1500">
+                <a:solidFill>
+                  <a:srgbClr val="22282E"/>
+                </a:solidFill>
+              </a:rPr>
+              <a:t>•  Runner efímero: máquina de CI de un solo uso. Característica: sin estado ni credenciales persistentes entre jobs.</a:t>
+            </a:r>
+          </a:p>
+          <a:p>
+            <a:pPr>
+              <a:spcAft>
+                <a:spcPts val="600"/>
+              </a:spcAft>
+            </a:pPr>
+            <a:r>
+              <a:rPr sz="1500">
+                <a:solidFill>
+                  <a:srgbClr val="22282E"/>
+                </a:solidFill>
+              </a:rPr>
+              <a:t>•  OIDC federation: obtener credenciales cloud cortas mediante identidad del workflow. Característica: elimina secretos de larga vida en el CI.</a:t>
             </a:r>
           </a:p>
         </p:txBody>
@@ -4853,7 +5319,7 @@
                   <a:srgbClr val="0B3D2E"/>
                 </a:solidFill>
               </a:rPr>
-              <a:t>📝 Reto verificable</a:t>
+              <a:t>🧰 Herramientas y preparación</a:t>
             </a:r>
           </a:p>
         </p:txBody>
@@ -4891,67 +5357,67 @@
                   <a:srgbClr val="22282E"/>
                 </a:solidFill>
               </a:rPr>
-              <a:t>•  Endurece un pipeline de CI/CD real aplicando los controles clave y demuéstralo con una auditoría.</a:t>
-            </a:r>
-          </a:p>
-          <a:p>
-            <a:pPr>
-              <a:spcAft>
-                <a:spcPts val="600"/>
-              </a:spcAft>
-            </a:pPr>
-            <a:r>
-              <a:rPr sz="1500">
-                <a:solidFill>
-                  <a:srgbClr val="22282E"/>
-                </a:solidFill>
-              </a:rPr>
-              <a:t>•  Criterio de aceptación: (a) todos los workflows tienen permissions de mínimo privilegio;</a:t>
-            </a:r>
-          </a:p>
-          <a:p>
-            <a:pPr>
-              <a:spcAft>
-                <a:spcPts val="600"/>
-              </a:spcAft>
-            </a:pPr>
-            <a:r>
-              <a:rPr sz="1500">
-                <a:solidFill>
-                  <a:srgbClr val="22282E"/>
-                </a:solidFill>
-              </a:rPr>
-              <a:t>•  (b) todas las acciones de terceros están pinneadas a SHA; (c) no hay uso inseguro de</a:t>
-            </a:r>
-          </a:p>
-          <a:p>
-            <a:pPr>
-              <a:spcAft>
-                <a:spcPts val="600"/>
-              </a:spcAft>
-            </a:pPr>
-            <a:r>
-              <a:rPr sz="1500">
-                <a:solidFill>
-                  <a:srgbClr val="22282E"/>
-                </a:solidFill>
-              </a:rPr>
-              <a:t>•  pullrequesttarget con secretos expuestos a código de forks; (d) el despliegue usa OIDC o,</a:t>
-            </a:r>
-          </a:p>
-          <a:p>
-            <a:pPr>
-              <a:spcAft>
-                <a:spcPts val="600"/>
-              </a:spcAft>
-            </a:pPr>
-            <a:r>
-              <a:rPr sz="1500">
-                <a:solidFill>
-                  <a:srgbClr val="22282E"/>
-                </a:solidFill>
-              </a:rPr>
-              <a:t>•  si no es posible, secretos con scope mínimo; y (e) zizmor no reporta hallazgos de severidad alta.</a:t>
+              <a:t>•  GitHub Actions (o GitLab CI / Jenkins) como plataforma de ejemplo.</a:t>
+            </a:r>
+          </a:p>
+          <a:p>
+            <a:pPr>
+              <a:spcAft>
+                <a:spcPts val="600"/>
+              </a:spcAft>
+            </a:pPr>
+            <a:r>
+              <a:rPr sz="1500">
+                <a:solidFill>
+                  <a:srgbClr val="22282E"/>
+                </a:solidFill>
+              </a:rPr>
+              <a:t>•  zizmor — analizador estático de seguridad para workflows de GitHub Actions.</a:t>
+            </a:r>
+          </a:p>
+          <a:p>
+            <a:pPr>
+              <a:spcAft>
+                <a:spcPts val="600"/>
+              </a:spcAft>
+            </a:pPr>
+            <a:r>
+              <a:rPr sz="1500">
+                <a:solidFill>
+                  <a:srgbClr val="22282E"/>
+                </a:solidFill>
+              </a:rPr>
+              <a:t>•  actionlint — linter de sintaxis y buenas prácticas de workflows.</a:t>
+            </a:r>
+          </a:p>
+          <a:p>
+            <a:pPr>
+              <a:spcAft>
+                <a:spcPts val="600"/>
+              </a:spcAft>
+            </a:pPr>
+            <a:r>
+              <a:rPr sz="1500">
+                <a:solidFill>
+                  <a:srgbClr val="22282E"/>
+                </a:solidFill>
+              </a:rPr>
+              <a:t>•  StepSecurity Harden-Runner — monitoriza y restringe el tráfico de red del runner.</a:t>
+            </a:r>
+          </a:p>
+          <a:p>
+            <a:pPr>
+              <a:spcAft>
+                <a:spcPts val="600"/>
+              </a:spcAft>
+            </a:pPr>
+            <a:r>
+              <a:rPr sz="1500">
+                <a:solidFill>
+                  <a:srgbClr val="22282E"/>
+                </a:solidFill>
+              </a:rPr>
+              <a:t>•  Instalación de zizmor:</a:t>
             </a:r>
           </a:p>
         </p:txBody>
